--- a/public/docs/identidade/tamoios-template-comercial.pptx
+++ b/public/docs/identidade/tamoios-template-comercial.pptx
@@ -15040,7 +15040,7 @@
               </a:defRPr>
             </a:pPr>
             <a:r>
-              <a:t>fernanda@tamoiostecnologia.com.br</a:t>
+              <a:t>comercial@tamoiostecnologia.com.br</a:t>
             </a:r>
           </a:p>
           <a:p>
@@ -15062,7 +15062,7 @@
               </a:defRPr>
             </a:pPr>
             <a:r>
-              <a:t>+55 11 94006 6986</a:t>
+              <a:t>011 0 94006 – 6986</a:t>
             </a:r>
           </a:p>
         </p:txBody>
